--- a/public/fun/cards/public/public-32.pptx
+++ b/public/fun/cards/public/public-32.pptx
@@ -3085,7 +3085,7 @@
     <p:bg>
       <p:bgPr>
         <a:solidFill>
-          <a:srgbClr val="FFFFFF"/>
+          <a:srgbClr val="FFF0E7"/>
         </a:solidFill>
         <a:effectLst/>
       </p:bgPr>
@@ -3099,14 +3099,43 @@
       <p:grpSpPr/>
       <p:sp>
         <p:nvSpPr>
-          <p:cNvPr id="2" name="텍스트"/>
+          <p:cNvPr id="2" name="Rectangle 1"/>
+          <p:cNvSpPr/>
+          <p:nvPr/>
+        </p:nvSpPr>
+        <p:spPr>
+          <a:xfrm>
+            <a:off x="252000" y="144000"/>
+            <a:ext cx="201600" cy="21600"/>
+          </a:xfrm>
+          <a:prstGeom prst="rect">
+            <a:avLst/>
+          </a:prstGeom>
+          <a:solidFill>
+            <a:srgbClr val="FF6A13"/>
+          </a:solidFill>
+          <a:ln>
+            <a:noFill/>
+          </a:ln>
+        </p:spPr>
+        <p:txBody>
+          <a:bodyPr rtlCol="0" anchor="ctr"/>
+          <a:lstStyle/>
+          <a:p>
+            <a:pPr algn="ctr"/>
+          </a:p>
+        </p:txBody>
+      </p:sp>
+      <p:sp>
+        <p:nvSpPr>
+          <p:cNvPr id="3" name="텍스트"/>
           <p:cNvSpPr txBox="1"/>
           <p:nvPr/>
         </p:nvSpPr>
         <p:spPr>
           <a:xfrm>
-            <a:off x="360000" y="201600"/>
-            <a:ext cx="2520000" cy="100800"/>
+            <a:off x="252000" y="273600"/>
+            <a:ext cx="2160000" cy="360000"/>
           </a:xfrm>
           <a:prstGeom prst="rect">
             <a:avLst/>
@@ -3119,89 +3148,21 @@
           </a:bodyPr>
           <a:lstStyle/>
           <a:p>
-            <a:pPr algn="ctr">
+            <a:pPr algn="l">
               <a:lnSpc>
-                <a:spcPts val="1015"/>
+                <a:spcPts val="3190"/>
               </a:lnSpc>
             </a:pPr>
             <a:r>
-              <a:rPr sz="700" b="1" spc="300">
+              <a:rPr sz="2200" b="1">
                 <a:solidFill>
-                  <a:srgbClr val="81754E"/>
+                  <a:srgbClr val="12151C"/>
                 </a:solidFill>
                 <a:latin typeface="맑은 고딕"/>
                 <a:ea typeface="맑은 고딕"/>
               </a:rPr>
-              <a:t>기관명 · 부서명</a:t>
-            </a:r>
-          </a:p>
-        </p:txBody>
-      </p:sp>
-      <p:sp>
-        <p:nvSpPr>
-          <p:cNvPr id="3" name="Freeform 2"/>
-          <p:cNvSpPr/>
-          <p:nvPr/>
-        </p:nvSpPr>
-        <p:spPr>
-          <a:xfrm>
-            <a:off x="1525503" y="404640"/>
-            <a:ext cx="188994" cy="179744"/>
-          </a:xfrm>
-          <a:custGeom>
-            <a:avLst/>
-            <a:gdLst/>
-            <a:ahLst/>
-            <a:cxnLst/>
-            <a:rect l="l" t="t" r="r" b="b"/>
-            <a:pathLst>
-              <a:path w="188994" h="179744">
-                <a:moveTo>
-                  <a:pt x="94497" y="0"/>
-                </a:moveTo>
-                <a:lnTo>
-                  <a:pt x="118620" y="66158"/>
-                </a:lnTo>
-                <a:lnTo>
-                  <a:pt x="188994" y="68656"/>
-                </a:lnTo>
-                <a:lnTo>
-                  <a:pt x="133528" y="112042"/>
-                </a:lnTo>
-                <a:lnTo>
-                  <a:pt x="152899" y="179744"/>
-                </a:lnTo>
-                <a:lnTo>
-                  <a:pt x="94497" y="140400"/>
-                </a:lnTo>
-                <a:lnTo>
-                  <a:pt x="36095" y="179744"/>
-                </a:lnTo>
-                <a:lnTo>
-                  <a:pt x="55466" y="112042"/>
-                </a:lnTo>
-                <a:lnTo>
-                  <a:pt x="0" y="68656"/>
-                </a:lnTo>
-                <a:lnTo>
-                  <a:pt x="70374" y="66158"/>
-                </a:lnTo>
-                <a:close/>
-              </a:path>
-            </a:pathLst>
-          </a:custGeom>
-          <a:solidFill>
-            <a:srgbClr val="CAA016"/>
-          </a:solidFill>
-          <a:ln>
-            <a:noFill/>
-          </a:ln>
-        </p:spPr>
-        <p:txBody>
-          <a:bodyPr rtlCol="0" anchor="ctr"/>
-          <a:lstStyle/>
-          <a:p>
-            <a:pPr algn="ctr"/>
+              <a:t>구민아</a:t>
+            </a:r>
           </a:p>
         </p:txBody>
       </p:sp>
@@ -3213,8 +3174,8 @@
         </p:nvSpPr>
         <p:spPr>
           <a:xfrm>
-            <a:off x="360000" y="684000"/>
-            <a:ext cx="2520000" cy="313692"/>
+            <a:off x="252000" y="676800"/>
+            <a:ext cx="2160000" cy="171451"/>
           </a:xfrm>
           <a:prstGeom prst="rect">
             <a:avLst/>
@@ -3227,20 +3188,20 @@
           </a:bodyPr>
           <a:lstStyle/>
           <a:p>
-            <a:pPr algn="ctr">
+            <a:pPr algn="l">
               <a:lnSpc>
-                <a:spcPts val="2755"/>
+                <a:spcPts val="1305"/>
               </a:lnSpc>
             </a:pPr>
             <a:r>
-              <a:rPr sz="1900" b="1" spc="50">
+              <a:rPr sz="900" b="0">
                 <a:solidFill>
-                  <a:srgbClr val="6E570C"/>
+                  <a:srgbClr val="6C3519"/>
                 </a:solidFill>
                 <a:latin typeface="맑은 고딕"/>
                 <a:ea typeface="맑은 고딕"/>
               </a:rPr>
-              <a:t>구민아</a:t>
+              <a:t>팀장</a:t>
             </a:r>
           </a:p>
         </p:txBody>
@@ -3253,8 +3214,8 @@
         </p:nvSpPr>
         <p:spPr>
           <a:xfrm>
-            <a:off x="360000" y="1051200"/>
-            <a:ext cx="2520000" cy="122400"/>
+            <a:off x="1548000" y="230400"/>
+            <a:ext cx="1440000" cy="123826"/>
           </a:xfrm>
           <a:prstGeom prst="rect">
             <a:avLst/>
@@ -3267,53 +3228,45 @@
           </a:bodyPr>
           <a:lstStyle/>
           <a:p>
-            <a:pPr algn="ctr">
+            <a:pPr algn="r">
               <a:lnSpc>
-                <a:spcPts val="1232"/>
+                <a:spcPts val="942"/>
               </a:lnSpc>
             </a:pPr>
             <a:r>
-              <a:rPr sz="850" b="1">
+              <a:rPr sz="650" b="1" spc="200">
                 <a:solidFill>
-                  <a:srgbClr val="8D700F"/>
+                  <a:srgbClr val="6C3519"/>
                 </a:solidFill>
                 <a:latin typeface="맑은 고딕"/>
                 <a:ea typeface="맑은 고딕"/>
               </a:rPr>
-              <a:t>팀장</a:t>
-            </a:r>
-          </a:p>
-        </p:txBody>
-      </p:sp>
-      <p:sp>
-        <p:nvSpPr>
-          <p:cNvPr id="6" name="Rectangle 5"/>
-          <p:cNvSpPr/>
+              <a:t>기관명 · 부서명</a:t>
+            </a:r>
+          </a:p>
+        </p:txBody>
+      </p:sp>
+      <p:cxnSp>
+        <p:nvCxnSpPr>
+          <p:cNvPr id="6" name="Connector 5"/>
+          <p:cNvCxnSpPr/>
           <p:nvPr/>
-        </p:nvSpPr>
+        </p:nvCxnSpPr>
         <p:spPr>
           <a:xfrm>
-            <a:off x="1512000" y="1245600"/>
-            <a:ext cx="216000" cy="10800"/>
+            <a:off x="252000" y="1051200"/>
+            <a:ext cx="2736000" cy="0"/>
           </a:xfrm>
-          <a:prstGeom prst="rect">
+          <a:prstGeom prst="line">
             <a:avLst/>
           </a:prstGeom>
-          <a:solidFill>
-            <a:srgbClr val="CAA016"/>
-          </a:solidFill>
-          <a:ln>
-            <a:noFill/>
+          <a:ln w="5760">
+            <a:solidFill>
+              <a:srgbClr val="FFD5BD"/>
+            </a:solidFill>
           </a:ln>
         </p:spPr>
-        <p:txBody>
-          <a:bodyPr rtlCol="0" anchor="ctr"/>
-          <a:lstStyle/>
-          <a:p>
-            <a:pPr algn="ctr"/>
-          </a:p>
-        </p:txBody>
-      </p:sp>
+      </p:cxnSp>
       <p:sp>
         <p:nvSpPr>
           <p:cNvPr id="7" name="텍스트"/>
@@ -3322,8 +3275,8 @@
         </p:nvSpPr>
         <p:spPr>
           <a:xfrm>
-            <a:off x="360000" y="1339200"/>
-            <a:ext cx="2520000" cy="108000"/>
+            <a:off x="252000" y="1123200"/>
+            <a:ext cx="576000" cy="99061"/>
           </a:xfrm>
           <a:prstGeom prst="rect">
             <a:avLst/>
@@ -3336,20 +3289,20 @@
           </a:bodyPr>
           <a:lstStyle/>
           <a:p>
-            <a:pPr algn="ctr">
+            <a:pPr algn="l">
               <a:lnSpc>
-                <a:spcPts val="1015"/>
+                <a:spcPts val="754"/>
               </a:lnSpc>
             </a:pPr>
             <a:r>
-              <a:rPr sz="700" b="0">
+              <a:rPr sz="520" b="1" spc="150">
                 <a:solidFill>
-                  <a:srgbClr val="6E570C"/>
+                  <a:srgbClr val="6C3519"/>
                 </a:solidFill>
                 <a:latin typeface="맑은 고딕"/>
                 <a:ea typeface="맑은 고딕"/>
               </a:rPr>
-              <a:t>010-1234-5678   ·   name@example.com</a:t>
+              <a:t>TEL</a:t>
             </a:r>
           </a:p>
         </p:txBody>
@@ -3362,8 +3315,8 @@
         </p:nvSpPr>
         <p:spPr>
           <a:xfrm>
-            <a:off x="360000" y="1468800"/>
-            <a:ext cx="2520000" cy="108000"/>
+            <a:off x="900000" y="1101600"/>
+            <a:ext cx="2088000" cy="142876"/>
           </a:xfrm>
           <a:prstGeom prst="rect">
             <a:avLst/>
@@ -3376,15 +3329,217 @@
           </a:bodyPr>
           <a:lstStyle/>
           <a:p>
-            <a:pPr algn="ctr">
+            <a:pPr algn="l">
               <a:lnSpc>
-                <a:spcPts val="1015"/>
+                <a:spcPts val="1087"/>
               </a:lnSpc>
             </a:pPr>
             <a:r>
-              <a:rPr sz="700" b="0">
+              <a:rPr sz="750" b="0">
                 <a:solidFill>
-                  <a:srgbClr val="81754E"/>
+                  <a:srgbClr val="12151C"/>
+                </a:solidFill>
+                <a:latin typeface="맑은 고딕"/>
+                <a:ea typeface="맑은 고딕"/>
+              </a:rPr>
+              <a:t>010-1234-5678</a:t>
+            </a:r>
+          </a:p>
+        </p:txBody>
+      </p:sp>
+      <p:cxnSp>
+        <p:nvCxnSpPr>
+          <p:cNvPr id="9" name="Connector 8"/>
+          <p:cNvCxnSpPr/>
+          <p:nvPr/>
+        </p:nvCxnSpPr>
+        <p:spPr>
+          <a:xfrm>
+            <a:off x="252000" y="1274400"/>
+            <a:ext cx="2736000" cy="0"/>
+          </a:xfrm>
+          <a:prstGeom prst="line">
+            <a:avLst/>
+          </a:prstGeom>
+          <a:ln w="5760">
+            <a:solidFill>
+              <a:srgbClr val="FFD5BD"/>
+            </a:solidFill>
+          </a:ln>
+        </p:spPr>
+      </p:cxnSp>
+      <p:sp>
+        <p:nvSpPr>
+          <p:cNvPr id="10" name="텍스트"/>
+          <p:cNvSpPr txBox="1"/>
+          <p:nvPr/>
+        </p:nvSpPr>
+        <p:spPr>
+          <a:xfrm>
+            <a:off x="252000" y="1346400"/>
+            <a:ext cx="576000" cy="99061"/>
+          </a:xfrm>
+          <a:prstGeom prst="rect">
+            <a:avLst/>
+          </a:prstGeom>
+          <a:noFill/>
+        </p:spPr>
+        <p:txBody>
+          <a:bodyPr wrap="square" lIns="0" rIns="0" tIns="0" bIns="0" anchor="t">
+            <a:spAutoFit/>
+          </a:bodyPr>
+          <a:lstStyle/>
+          <a:p>
+            <a:pPr algn="l">
+              <a:lnSpc>
+                <a:spcPts val="754"/>
+              </a:lnSpc>
+            </a:pPr>
+            <a:r>
+              <a:rPr sz="520" b="1" spc="150">
+                <a:solidFill>
+                  <a:srgbClr val="6C3519"/>
+                </a:solidFill>
+                <a:latin typeface="맑은 고딕"/>
+                <a:ea typeface="맑은 고딕"/>
+              </a:rPr>
+              <a:t>MAIL</a:t>
+            </a:r>
+          </a:p>
+        </p:txBody>
+      </p:sp>
+      <p:sp>
+        <p:nvSpPr>
+          <p:cNvPr id="11" name="텍스트"/>
+          <p:cNvSpPr txBox="1"/>
+          <p:nvPr/>
+        </p:nvSpPr>
+        <p:spPr>
+          <a:xfrm>
+            <a:off x="900000" y="1324800"/>
+            <a:ext cx="2088000" cy="142876"/>
+          </a:xfrm>
+          <a:prstGeom prst="rect">
+            <a:avLst/>
+          </a:prstGeom>
+          <a:noFill/>
+        </p:spPr>
+        <p:txBody>
+          <a:bodyPr wrap="square" lIns="0" rIns="0" tIns="0" bIns="0" anchor="t">
+            <a:spAutoFit/>
+          </a:bodyPr>
+          <a:lstStyle/>
+          <a:p>
+            <a:pPr algn="l">
+              <a:lnSpc>
+                <a:spcPts val="1087"/>
+              </a:lnSpc>
+            </a:pPr>
+            <a:r>
+              <a:rPr sz="750" b="0">
+                <a:solidFill>
+                  <a:srgbClr val="12151C"/>
+                </a:solidFill>
+                <a:latin typeface="맑은 고딕"/>
+                <a:ea typeface="맑은 고딕"/>
+              </a:rPr>
+              <a:t>name@example.com</a:t>
+            </a:r>
+          </a:p>
+        </p:txBody>
+      </p:sp>
+      <p:cxnSp>
+        <p:nvCxnSpPr>
+          <p:cNvPr id="12" name="Connector 11"/>
+          <p:cNvCxnSpPr/>
+          <p:nvPr/>
+        </p:nvCxnSpPr>
+        <p:spPr>
+          <a:xfrm>
+            <a:off x="252000" y="1497600"/>
+            <a:ext cx="2736000" cy="0"/>
+          </a:xfrm>
+          <a:prstGeom prst="line">
+            <a:avLst/>
+          </a:prstGeom>
+          <a:ln w="5760">
+            <a:solidFill>
+              <a:srgbClr val="FFD5BD"/>
+            </a:solidFill>
+          </a:ln>
+        </p:spPr>
+      </p:cxnSp>
+      <p:sp>
+        <p:nvSpPr>
+          <p:cNvPr id="13" name="텍스트"/>
+          <p:cNvSpPr txBox="1"/>
+          <p:nvPr/>
+        </p:nvSpPr>
+        <p:spPr>
+          <a:xfrm>
+            <a:off x="252000" y="1569600"/>
+            <a:ext cx="576000" cy="99061"/>
+          </a:xfrm>
+          <a:prstGeom prst="rect">
+            <a:avLst/>
+          </a:prstGeom>
+          <a:noFill/>
+        </p:spPr>
+        <p:txBody>
+          <a:bodyPr wrap="square" lIns="0" rIns="0" tIns="0" bIns="0" anchor="t">
+            <a:spAutoFit/>
+          </a:bodyPr>
+          <a:lstStyle/>
+          <a:p>
+            <a:pPr algn="l">
+              <a:lnSpc>
+                <a:spcPts val="754"/>
+              </a:lnSpc>
+            </a:pPr>
+            <a:r>
+              <a:rPr sz="520" b="1" spc="150">
+                <a:solidFill>
+                  <a:srgbClr val="6C3519"/>
+                </a:solidFill>
+                <a:latin typeface="맑은 고딕"/>
+                <a:ea typeface="맑은 고딕"/>
+              </a:rPr>
+              <a:t>ADDR</a:t>
+            </a:r>
+          </a:p>
+        </p:txBody>
+      </p:sp>
+      <p:sp>
+        <p:nvSpPr>
+          <p:cNvPr id="14" name="텍스트"/>
+          <p:cNvSpPr txBox="1"/>
+          <p:nvPr/>
+        </p:nvSpPr>
+        <p:spPr>
+          <a:xfrm>
+            <a:off x="900000" y="1548000"/>
+            <a:ext cx="2088000" cy="142876"/>
+          </a:xfrm>
+          <a:prstGeom prst="rect">
+            <a:avLst/>
+          </a:prstGeom>
+          <a:noFill/>
+        </p:spPr>
+        <p:txBody>
+          <a:bodyPr wrap="square" lIns="0" rIns="0" tIns="0" bIns="0" anchor="t">
+            <a:spAutoFit/>
+          </a:bodyPr>
+          <a:lstStyle/>
+          <a:p>
+            <a:pPr algn="l">
+              <a:lnSpc>
+                <a:spcPts val="1087"/>
+              </a:lnSpc>
+            </a:pPr>
+            <a:r>
+              <a:rPr sz="750" b="0">
+                <a:solidFill>
+                  <a:srgbClr val="12151C"/>
                 </a:solidFill>
                 <a:latin typeface="맑은 고딕"/>
                 <a:ea typeface="맑은 고딕"/>
@@ -3394,6 +3549,27 @@
           </a:p>
         </p:txBody>
       </p:sp>
+      <p:cxnSp>
+        <p:nvCxnSpPr>
+          <p:cNvPr id="15" name="Connector 14"/>
+          <p:cNvCxnSpPr/>
+          <p:nvPr/>
+        </p:nvCxnSpPr>
+        <p:spPr>
+          <a:xfrm>
+            <a:off x="252000" y="1720800"/>
+            <a:ext cx="2736000" cy="0"/>
+          </a:xfrm>
+          <a:prstGeom prst="line">
+            <a:avLst/>
+          </a:prstGeom>
+          <a:ln w="5760">
+            <a:solidFill>
+              <a:srgbClr val="FFD5BD"/>
+            </a:solidFill>
+          </a:ln>
+        </p:spPr>
+      </p:cxnSp>
     </p:spTree>
   </p:cSld>
   <p:clrMapOvr>
@@ -3428,14 +3604,14 @@
         </p:nvSpPr>
         <p:spPr>
           <a:xfrm>
-            <a:off x="0" y="0"/>
-            <a:ext cx="64800" cy="1800000"/>
+            <a:off x="252000" y="540000"/>
+            <a:ext cx="28800" cy="720000"/>
           </a:xfrm>
           <a:prstGeom prst="rect">
             <a:avLst/>
           </a:prstGeom>
           <a:solidFill>
-            <a:srgbClr val="CAA016"/>
+            <a:srgbClr val="FF6A13"/>
           </a:solidFill>
           <a:ln>
             <a:noFill/>
@@ -3457,8 +3633,8 @@
         </p:nvSpPr>
         <p:spPr>
           <a:xfrm>
-            <a:off x="252000" y="432000"/>
-            <a:ext cx="2016000" cy="252000"/>
+            <a:off x="424800" y="612000"/>
+            <a:ext cx="2160000" cy="648000"/>
           </a:xfrm>
           <a:prstGeom prst="rect">
             <a:avLst/>
@@ -3473,18 +3649,35 @@
           <a:p>
             <a:pPr algn="l">
               <a:lnSpc>
-                <a:spcPts val="2465"/>
+                <a:spcPts val="1812"/>
               </a:lnSpc>
             </a:pPr>
             <a:r>
-              <a:rPr sz="1700" b="1">
+              <a:rPr sz="1250" b="1">
                 <a:solidFill>
-                  <a:srgbClr val="6E570C"/>
+                  <a:srgbClr val="12151C"/>
                 </a:solidFill>
                 <a:latin typeface="맑은 고딕"/>
                 <a:ea typeface="맑은 고딕"/>
               </a:rPr>
-              <a:t>기관명 · 부서명</a:t>
+              <a:t>원칙을 지키며</a:t>
+            </a:r>
+          </a:p>
+          <a:p>
+            <a:pPr algn="l">
+              <a:lnSpc>
+                <a:spcPts val="1812"/>
+              </a:lnSpc>
+            </a:pPr>
+            <a:r>
+              <a:rPr sz="1250" b="1">
+                <a:solidFill>
+                  <a:srgbClr val="12151C"/>
+                </a:solidFill>
+                <a:latin typeface="맑은 고딕"/>
+                <a:ea typeface="맑은 고딕"/>
+              </a:rPr>
+              <a:t>사람을 살핍니다</a:t>
             </a:r>
           </a:p>
         </p:txBody>
@@ -3497,8 +3690,8 @@
         </p:nvSpPr>
         <p:spPr>
           <a:xfrm>
-            <a:off x="252000" y="878400"/>
-            <a:ext cx="2016000" cy="540000"/>
+            <a:off x="424800" y="1512000"/>
+            <a:ext cx="1800000" cy="123826"/>
           </a:xfrm>
           <a:prstGeom prst="rect">
             <a:avLst/>
@@ -3513,186 +3706,19 @@
           <a:p>
             <a:pPr algn="l">
               <a:lnSpc>
-                <a:spcPts val="1232"/>
+                <a:spcPts val="942"/>
               </a:lnSpc>
             </a:pPr>
             <a:r>
-              <a:rPr sz="850" b="0">
+              <a:rPr sz="650" b="1" spc="200">
                 <a:solidFill>
-                  <a:srgbClr val="81754E"/>
+                  <a:srgbClr val="6B7280"/>
                 </a:solidFill>
                 <a:latin typeface="맑은 고딕"/>
                 <a:ea typeface="맑은 고딕"/>
               </a:rPr>
-              <a:t>원칙을 지키며 사람을 살핍니다</a:t>
-            </a:r>
-          </a:p>
-        </p:txBody>
-      </p:sp>
-      <p:sp>
-        <p:nvSpPr>
-          <p:cNvPr id="5" name="Rectangle 4"/>
-          <p:cNvSpPr/>
-          <p:nvPr/>
-        </p:nvSpPr>
-        <p:spPr>
-          <a:xfrm>
-            <a:off x="2520000" y="1080000"/>
-            <a:ext cx="504000" cy="504000"/>
-          </a:xfrm>
-          <a:prstGeom prst="rect">
-            <a:avLst/>
-          </a:prstGeom>
-          <a:noFill/>
-          <a:ln w="9000">
-            <a:solidFill>
-              <a:srgbClr val="CAA016"/>
-            </a:solidFill>
-            <a:prstDash val="dash"/>
-          </a:ln>
-        </p:spPr>
-        <p:txBody>
-          <a:bodyPr rtlCol="0" anchor="ctr"/>
-          <a:lstStyle/>
-          <a:p>
-            <a:pPr algn="ctr"/>
-          </a:p>
-        </p:txBody>
-      </p:sp>
-      <p:sp>
-        <p:nvSpPr>
-          <p:cNvPr id="6" name="텍스트"/>
-          <p:cNvSpPr txBox="1"/>
-          <p:nvPr/>
-        </p:nvSpPr>
-        <p:spPr>
-          <a:xfrm>
-            <a:off x="2520000" y="1080000"/>
-            <a:ext cx="504000" cy="504000"/>
-          </a:xfrm>
-          <a:prstGeom prst="rect">
-            <a:avLst/>
-          </a:prstGeom>
-          <a:noFill/>
-        </p:spPr>
-        <p:txBody>
-          <a:bodyPr wrap="square" lIns="0" rIns="0" tIns="0" bIns="0" anchor="ctr">
-            <a:spAutoFit/>
-          </a:bodyPr>
-          <a:lstStyle/>
-          <a:p>
-            <a:pPr algn="ctr">
-              <a:lnSpc>
-                <a:spcPts val="1305"/>
-              </a:lnSpc>
-            </a:pPr>
-            <a:r>
-              <a:rPr sz="900" b="1">
-                <a:solidFill>
-                  <a:srgbClr val="81754E"/>
-                </a:solidFill>
-                <a:latin typeface="맑은 고딕"/>
-                <a:ea typeface="맑은 고딕"/>
-              </a:rPr>
-              <a:t>QR</a:t>
-            </a:r>
-          </a:p>
-        </p:txBody>
-      </p:sp>
-      <p:sp>
-        <p:nvSpPr>
-          <p:cNvPr id="7" name="Rectangle 6"/>
-          <p:cNvSpPr/>
-          <p:nvPr/>
-        </p:nvSpPr>
-        <p:spPr>
-          <a:xfrm>
-            <a:off x="252000" y="763200"/>
-            <a:ext cx="201600" cy="14400"/>
-          </a:xfrm>
-          <a:prstGeom prst="rect">
-            <a:avLst/>
-          </a:prstGeom>
-          <a:solidFill>
-            <a:srgbClr val="CAA016"/>
-          </a:solidFill>
-          <a:ln>
-            <a:noFill/>
-          </a:ln>
-        </p:spPr>
-        <p:txBody>
-          <a:bodyPr rtlCol="0" anchor="ctr"/>
-          <a:lstStyle/>
-          <a:p>
-            <a:pPr algn="ctr"/>
-          </a:p>
-        </p:txBody>
-      </p:sp>
-      <p:sp>
-        <p:nvSpPr>
-          <p:cNvPr id="8" name="Freeform 7"/>
-          <p:cNvSpPr/>
-          <p:nvPr/>
-        </p:nvSpPr>
-        <p:spPr>
-          <a:xfrm>
-            <a:off x="2630255" y="282960"/>
-            <a:ext cx="283490" cy="269616"/>
-          </a:xfrm>
-          <a:custGeom>
-            <a:avLst/>
-            <a:gdLst/>
-            <a:ahLst/>
-            <a:cxnLst/>
-            <a:rect l="l" t="t" r="r" b="b"/>
-            <a:pathLst>
-              <a:path w="283490" h="269616">
-                <a:moveTo>
-                  <a:pt x="141745" y="0"/>
-                </a:moveTo>
-                <a:lnTo>
-                  <a:pt x="177929" y="99237"/>
-                </a:lnTo>
-                <a:lnTo>
-                  <a:pt x="283490" y="102984"/>
-                </a:lnTo>
-                <a:lnTo>
-                  <a:pt x="200292" y="168063"/>
-                </a:lnTo>
-                <a:lnTo>
-                  <a:pt x="229349" y="269616"/>
-                </a:lnTo>
-                <a:lnTo>
-                  <a:pt x="141745" y="210600"/>
-                </a:lnTo>
-                <a:lnTo>
-                  <a:pt x="54141" y="269616"/>
-                </a:lnTo>
-                <a:lnTo>
-                  <a:pt x="83198" y="168063"/>
-                </a:lnTo>
-                <a:lnTo>
-                  <a:pt x="0" y="102984"/>
-                </a:lnTo>
-                <a:lnTo>
-                  <a:pt x="105561" y="99237"/>
-                </a:lnTo>
-                <a:close/>
-              </a:path>
-            </a:pathLst>
-          </a:custGeom>
-          <a:solidFill>
-            <a:srgbClr val="CAA016"/>
-          </a:solidFill>
-          <a:ln>
-            <a:noFill/>
-          </a:ln>
-        </p:spPr>
-        <p:txBody>
-          <a:bodyPr rtlCol="0" anchor="ctr"/>
-          <a:lstStyle/>
-          <a:p>
-            <a:pPr algn="ctr"/>
+              <a:t>기관명 · 부서명</a:t>
+            </a:r>
           </a:p>
         </p:txBody>
       </p:sp>

--- a/public/fun/cards/public/public-32.pptx
+++ b/public/fun/cards/public/public-32.pptx
@@ -3105,8 +3105,8 @@
         </p:nvSpPr>
         <p:spPr>
           <a:xfrm>
-            <a:off x="252000" y="144000"/>
-            <a:ext cx="201600" cy="21600"/>
+            <a:off x="0" y="0"/>
+            <a:ext cx="3240000" cy="36000"/>
           </a:xfrm>
           <a:prstGeom prst="rect">
             <a:avLst/>
@@ -3134,8 +3134,8 @@
         </p:nvSpPr>
         <p:spPr>
           <a:xfrm>
-            <a:off x="252000" y="273600"/>
-            <a:ext cx="2160000" cy="360000"/>
+            <a:off x="252000" y="223200"/>
+            <a:ext cx="1296000" cy="237600"/>
           </a:xfrm>
           <a:prstGeom prst="rect">
             <a:avLst/>
@@ -3150,11 +3150,11 @@
           <a:p>
             <a:pPr algn="l">
               <a:lnSpc>
-                <a:spcPts val="3190"/>
+                <a:spcPts val="1957"/>
               </a:lnSpc>
             </a:pPr>
             <a:r>
-              <a:rPr sz="2200" b="1">
+              <a:rPr sz="1350" b="1" spc="120">
                 <a:solidFill>
                   <a:srgbClr val="12151C"/>
                 </a:solidFill>
@@ -3174,8 +3174,8 @@
         </p:nvSpPr>
         <p:spPr>
           <a:xfrm>
-            <a:off x="252000" y="676800"/>
-            <a:ext cx="2160000" cy="171451"/>
+            <a:off x="252000" y="475200"/>
+            <a:ext cx="1296000" cy="133351"/>
           </a:xfrm>
           <a:prstGeom prst="rect">
             <a:avLst/>
@@ -3190,11 +3190,11 @@
           <a:p>
             <a:pPr algn="l">
               <a:lnSpc>
-                <a:spcPts val="1305"/>
+                <a:spcPts val="1015"/>
               </a:lnSpc>
             </a:pPr>
             <a:r>
-              <a:rPr sz="900" b="0">
+              <a:rPr sz="700" b="0">
                 <a:solidFill>
                   <a:srgbClr val="6C3519"/>
                 </a:solidFill>
@@ -3214,7 +3214,7 @@
         </p:nvSpPr>
         <p:spPr>
           <a:xfrm>
-            <a:off x="1548000" y="230400"/>
+            <a:off x="1548000" y="259200"/>
             <a:ext cx="1440000" cy="123826"/>
           </a:xfrm>
           <a:prstGeom prst="rect">
@@ -3234,7 +3234,7 @@
               </a:lnSpc>
             </a:pPr>
             <a:r>
-              <a:rPr sz="650" b="1" spc="200">
+              <a:rPr sz="650" b="1" spc="220">
                 <a:solidFill>
                   <a:srgbClr val="6C3519"/>
                 </a:solidFill>
@@ -3254,13 +3254,13 @@
         </p:nvCxnSpPr>
         <p:spPr>
           <a:xfrm>
-            <a:off x="252000" y="1051200"/>
+            <a:off x="252000" y="907200"/>
             <a:ext cx="2736000" cy="0"/>
           </a:xfrm>
           <a:prstGeom prst="line">
             <a:avLst/>
           </a:prstGeom>
-          <a:ln w="5760">
+          <a:ln w="3600">
             <a:solidFill>
               <a:srgbClr val="FFD5BD"/>
             </a:solidFill>
@@ -3275,8 +3275,8 @@
         </p:nvSpPr>
         <p:spPr>
           <a:xfrm>
-            <a:off x="252000" y="1123200"/>
-            <a:ext cx="576000" cy="99061"/>
+            <a:off x="252000" y="986400"/>
+            <a:ext cx="576000" cy="91441"/>
           </a:xfrm>
           <a:prstGeom prst="rect">
             <a:avLst/>
@@ -3291,11 +3291,11 @@
           <a:p>
             <a:pPr algn="l">
               <a:lnSpc>
-                <a:spcPts val="754"/>
+                <a:spcPts val="696"/>
               </a:lnSpc>
             </a:pPr>
             <a:r>
-              <a:rPr sz="520" b="1" spc="150">
+              <a:rPr sz="480" b="1" spc="160">
                 <a:solidFill>
                   <a:srgbClr val="6C3519"/>
                 </a:solidFill>
@@ -3315,8 +3315,8 @@
         </p:nvSpPr>
         <p:spPr>
           <a:xfrm>
-            <a:off x="900000" y="1101600"/>
-            <a:ext cx="2088000" cy="142876"/>
+            <a:off x="936000" y="968400"/>
+            <a:ext cx="2052000" cy="133351"/>
           </a:xfrm>
           <a:prstGeom prst="rect">
             <a:avLst/>
@@ -3331,11 +3331,11 @@
           <a:p>
             <a:pPr algn="l">
               <a:lnSpc>
-                <a:spcPts val="1087"/>
+                <a:spcPts val="1015"/>
               </a:lnSpc>
             </a:pPr>
             <a:r>
-              <a:rPr sz="750" b="0">
+              <a:rPr sz="700" b="0">
                 <a:solidFill>
                   <a:srgbClr val="12151C"/>
                 </a:solidFill>
@@ -3355,13 +3355,13 @@
         </p:nvCxnSpPr>
         <p:spPr>
           <a:xfrm>
-            <a:off x="252000" y="1274400"/>
+            <a:off x="252000" y="1137600"/>
             <a:ext cx="2736000" cy="0"/>
           </a:xfrm>
           <a:prstGeom prst="line">
             <a:avLst/>
           </a:prstGeom>
-          <a:ln w="5760">
+          <a:ln w="3600">
             <a:solidFill>
               <a:srgbClr val="FFD5BD"/>
             </a:solidFill>
@@ -3376,8 +3376,8 @@
         </p:nvSpPr>
         <p:spPr>
           <a:xfrm>
-            <a:off x="252000" y="1346400"/>
-            <a:ext cx="576000" cy="99061"/>
+            <a:off x="252000" y="1216800"/>
+            <a:ext cx="576000" cy="91441"/>
           </a:xfrm>
           <a:prstGeom prst="rect">
             <a:avLst/>
@@ -3392,11 +3392,11 @@
           <a:p>
             <a:pPr algn="l">
               <a:lnSpc>
-                <a:spcPts val="754"/>
+                <a:spcPts val="696"/>
               </a:lnSpc>
             </a:pPr>
             <a:r>
-              <a:rPr sz="520" b="1" spc="150">
+              <a:rPr sz="480" b="1" spc="160">
                 <a:solidFill>
                   <a:srgbClr val="6C3519"/>
                 </a:solidFill>
@@ -3416,8 +3416,8 @@
         </p:nvSpPr>
         <p:spPr>
           <a:xfrm>
-            <a:off x="900000" y="1324800"/>
-            <a:ext cx="2088000" cy="142876"/>
+            <a:off x="936000" y="1198800"/>
+            <a:ext cx="2052000" cy="133351"/>
           </a:xfrm>
           <a:prstGeom prst="rect">
             <a:avLst/>
@@ -3432,11 +3432,11 @@
           <a:p>
             <a:pPr algn="l">
               <a:lnSpc>
-                <a:spcPts val="1087"/>
+                <a:spcPts val="1015"/>
               </a:lnSpc>
             </a:pPr>
             <a:r>
-              <a:rPr sz="750" b="0">
+              <a:rPr sz="700" b="0">
                 <a:solidFill>
                   <a:srgbClr val="12151C"/>
                 </a:solidFill>
@@ -3456,13 +3456,13 @@
         </p:nvCxnSpPr>
         <p:spPr>
           <a:xfrm>
-            <a:off x="252000" y="1497600"/>
+            <a:off x="252000" y="1368000"/>
             <a:ext cx="2736000" cy="0"/>
           </a:xfrm>
           <a:prstGeom prst="line">
             <a:avLst/>
           </a:prstGeom>
-          <a:ln w="5760">
+          <a:ln w="3600">
             <a:solidFill>
               <a:srgbClr val="FFD5BD"/>
             </a:solidFill>
@@ -3477,8 +3477,8 @@
         </p:nvSpPr>
         <p:spPr>
           <a:xfrm>
-            <a:off x="252000" y="1569600"/>
-            <a:ext cx="576000" cy="99061"/>
+            <a:off x="252000" y="1447200"/>
+            <a:ext cx="576000" cy="91441"/>
           </a:xfrm>
           <a:prstGeom prst="rect">
             <a:avLst/>
@@ -3493,11 +3493,11 @@
           <a:p>
             <a:pPr algn="l">
               <a:lnSpc>
-                <a:spcPts val="754"/>
+                <a:spcPts val="696"/>
               </a:lnSpc>
             </a:pPr>
             <a:r>
-              <a:rPr sz="520" b="1" spc="150">
+              <a:rPr sz="480" b="1" spc="160">
                 <a:solidFill>
                   <a:srgbClr val="6C3519"/>
                 </a:solidFill>
@@ -3517,8 +3517,8 @@
         </p:nvSpPr>
         <p:spPr>
           <a:xfrm>
-            <a:off x="900000" y="1548000"/>
-            <a:ext cx="2088000" cy="142876"/>
+            <a:off x="936000" y="1429200"/>
+            <a:ext cx="2052000" cy="133351"/>
           </a:xfrm>
           <a:prstGeom prst="rect">
             <a:avLst/>
@@ -3533,11 +3533,11 @@
           <a:p>
             <a:pPr algn="l">
               <a:lnSpc>
-                <a:spcPts val="1087"/>
+                <a:spcPts val="1015"/>
               </a:lnSpc>
             </a:pPr>
             <a:r>
-              <a:rPr sz="750" b="0">
+              <a:rPr sz="700" b="0">
                 <a:solidFill>
                   <a:srgbClr val="12151C"/>
                 </a:solidFill>
@@ -3557,13 +3557,13 @@
         </p:nvCxnSpPr>
         <p:spPr>
           <a:xfrm>
-            <a:off x="252000" y="1720800"/>
+            <a:off x="252000" y="1598400"/>
             <a:ext cx="2736000" cy="0"/>
           </a:xfrm>
           <a:prstGeom prst="line">
             <a:avLst/>
           </a:prstGeom>
-          <a:ln w="5760">
+          <a:ln w="3600">
             <a:solidFill>
               <a:srgbClr val="FFD5BD"/>
             </a:solidFill>
@@ -3598,43 +3598,14 @@
       <p:grpSpPr/>
       <p:sp>
         <p:nvSpPr>
-          <p:cNvPr id="2" name="Rectangle 1"/>
-          <p:cNvSpPr/>
-          <p:nvPr/>
-        </p:nvSpPr>
-        <p:spPr>
-          <a:xfrm>
-            <a:off x="252000" y="540000"/>
-            <a:ext cx="28800" cy="720000"/>
-          </a:xfrm>
-          <a:prstGeom prst="rect">
-            <a:avLst/>
-          </a:prstGeom>
-          <a:solidFill>
-            <a:srgbClr val="FF6A13"/>
-          </a:solidFill>
-          <a:ln>
-            <a:noFill/>
-          </a:ln>
-        </p:spPr>
-        <p:txBody>
-          <a:bodyPr rtlCol="0" anchor="ctr"/>
-          <a:lstStyle/>
-          <a:p>
-            <a:pPr algn="ctr"/>
-          </a:p>
-        </p:txBody>
-      </p:sp>
-      <p:sp>
-        <p:nvSpPr>
-          <p:cNvPr id="3" name="텍스트"/>
+          <p:cNvPr id="2" name="텍스트"/>
           <p:cNvSpPr txBox="1"/>
           <p:nvPr/>
         </p:nvSpPr>
         <p:spPr>
           <a:xfrm>
-            <a:off x="424800" y="612000"/>
-            <a:ext cx="2160000" cy="648000"/>
+            <a:off x="252000" y="223200"/>
+            <a:ext cx="1080000" cy="99061"/>
           </a:xfrm>
           <a:prstGeom prst="rect">
             <a:avLst/>
@@ -3649,49 +3620,255 @@
           <a:p>
             <a:pPr algn="l">
               <a:lnSpc>
-                <a:spcPts val="1812"/>
+                <a:spcPts val="754"/>
               </a:lnSpc>
             </a:pPr>
             <a:r>
-              <a:rPr sz="1250" b="1">
+              <a:rPr sz="520" b="1" spc="240">
+                <a:solidFill>
+                  <a:srgbClr val="6B7280"/>
+                </a:solidFill>
+                <a:latin typeface="맑은 고딕"/>
+                <a:ea typeface="맑은 고딕"/>
+              </a:rPr>
+              <a:t>담당 업무</a:t>
+            </a:r>
+          </a:p>
+        </p:txBody>
+      </p:sp>
+      <p:cxnSp>
+        <p:nvCxnSpPr>
+          <p:cNvPr id="3" name="Connector 2"/>
+          <p:cNvCxnSpPr/>
+          <p:nvPr/>
+        </p:nvCxnSpPr>
+        <p:spPr>
+          <a:xfrm>
+            <a:off x="252000" y="388800"/>
+            <a:ext cx="2736000" cy="0"/>
+          </a:xfrm>
+          <a:prstGeom prst="line">
+            <a:avLst/>
+          </a:prstGeom>
+          <a:ln w="3600">
+            <a:solidFill>
+              <a:srgbClr val="E3E5E9"/>
+            </a:solidFill>
+          </a:ln>
+        </p:spPr>
+      </p:cxnSp>
+      <p:sp>
+        <p:nvSpPr>
+          <p:cNvPr id="4" name="텍스트"/>
+          <p:cNvSpPr txBox="1"/>
+          <p:nvPr/>
+        </p:nvSpPr>
+        <p:spPr>
+          <a:xfrm>
+            <a:off x="252000" y="468000"/>
+            <a:ext cx="216000" cy="99061"/>
+          </a:xfrm>
+          <a:prstGeom prst="rect">
+            <a:avLst/>
+          </a:prstGeom>
+          <a:noFill/>
+        </p:spPr>
+        <p:txBody>
+          <a:bodyPr wrap="square" lIns="0" rIns="0" tIns="0" bIns="0" anchor="t">
+            <a:spAutoFit/>
+          </a:bodyPr>
+          <a:lstStyle/>
+          <a:p>
+            <a:pPr algn="l">
+              <a:lnSpc>
+                <a:spcPts val="754"/>
+              </a:lnSpc>
+            </a:pPr>
+            <a:r>
+              <a:rPr sz="520" b="1" spc="100">
+                <a:solidFill>
+                  <a:srgbClr val="FF6A13"/>
+                </a:solidFill>
+                <a:latin typeface="맑은 고딕"/>
+                <a:ea typeface="맑은 고딕"/>
+              </a:rPr>
+              <a:t>01</a:t>
+            </a:r>
+          </a:p>
+        </p:txBody>
+      </p:sp>
+      <p:sp>
+        <p:nvSpPr>
+          <p:cNvPr id="5" name="텍스트"/>
+          <p:cNvSpPr txBox="1"/>
+          <p:nvPr/>
+        </p:nvSpPr>
+        <p:spPr>
+          <a:xfrm>
+            <a:off x="475200" y="457200"/>
+            <a:ext cx="1152000" cy="140971"/>
+          </a:xfrm>
+          <a:prstGeom prst="rect">
+            <a:avLst/>
+          </a:prstGeom>
+          <a:noFill/>
+        </p:spPr>
+        <p:txBody>
+          <a:bodyPr wrap="square" lIns="0" rIns="0" tIns="0" bIns="0" anchor="t">
+            <a:spAutoFit/>
+          </a:bodyPr>
+          <a:lstStyle/>
+          <a:p>
+            <a:pPr algn="l">
+              <a:lnSpc>
+                <a:spcPts val="1073"/>
+              </a:lnSpc>
+            </a:pPr>
+            <a:r>
+              <a:rPr sz="740" b="0">
                 <a:solidFill>
                   <a:srgbClr val="12151C"/>
                 </a:solidFill>
                 <a:latin typeface="맑은 고딕"/>
                 <a:ea typeface="맑은 고딕"/>
               </a:rPr>
-              <a:t>원칙을 지키며</a:t>
-            </a:r>
-          </a:p>
+              <a:t>행정 지원</a:t>
+            </a:r>
+          </a:p>
+        </p:txBody>
+      </p:sp>
+      <p:cxnSp>
+        <p:nvCxnSpPr>
+          <p:cNvPr id="6" name="Connector 5"/>
+          <p:cNvCxnSpPr/>
+          <p:nvPr/>
+        </p:nvCxnSpPr>
+        <p:spPr>
+          <a:xfrm>
+            <a:off x="252000" y="691200"/>
+            <a:ext cx="1296000" cy="0"/>
+          </a:xfrm>
+          <a:prstGeom prst="line">
+            <a:avLst/>
+          </a:prstGeom>
+          <a:ln w="3600">
+            <a:solidFill>
+              <a:srgbClr val="E3E5E9"/>
+            </a:solidFill>
+          </a:ln>
+        </p:spPr>
+      </p:cxnSp>
+      <p:sp>
+        <p:nvSpPr>
+          <p:cNvPr id="7" name="텍스트"/>
+          <p:cNvSpPr txBox="1"/>
+          <p:nvPr/>
+        </p:nvSpPr>
+        <p:spPr>
+          <a:xfrm>
+            <a:off x="1656000" y="468000"/>
+            <a:ext cx="216000" cy="99061"/>
+          </a:xfrm>
+          <a:prstGeom prst="rect">
+            <a:avLst/>
+          </a:prstGeom>
+          <a:noFill/>
+        </p:spPr>
+        <p:txBody>
+          <a:bodyPr wrap="square" lIns="0" rIns="0" tIns="0" bIns="0" anchor="t">
+            <a:spAutoFit/>
+          </a:bodyPr>
+          <a:lstStyle/>
           <a:p>
             <a:pPr algn="l">
               <a:lnSpc>
-                <a:spcPts val="1812"/>
+                <a:spcPts val="754"/>
               </a:lnSpc>
             </a:pPr>
             <a:r>
-              <a:rPr sz="1250" b="1">
+              <a:rPr sz="520" b="1" spc="100">
+                <a:solidFill>
+                  <a:srgbClr val="FF6A13"/>
+                </a:solidFill>
+                <a:latin typeface="맑은 고딕"/>
+                <a:ea typeface="맑은 고딕"/>
+              </a:rPr>
+              <a:t>02</a:t>
+            </a:r>
+          </a:p>
+        </p:txBody>
+      </p:sp>
+      <p:sp>
+        <p:nvSpPr>
+          <p:cNvPr id="8" name="텍스트"/>
+          <p:cNvSpPr txBox="1"/>
+          <p:nvPr/>
+        </p:nvSpPr>
+        <p:spPr>
+          <a:xfrm>
+            <a:off x="1879200" y="457200"/>
+            <a:ext cx="1152000" cy="140971"/>
+          </a:xfrm>
+          <a:prstGeom prst="rect">
+            <a:avLst/>
+          </a:prstGeom>
+          <a:noFill/>
+        </p:spPr>
+        <p:txBody>
+          <a:bodyPr wrap="square" lIns="0" rIns="0" tIns="0" bIns="0" anchor="t">
+            <a:spAutoFit/>
+          </a:bodyPr>
+          <a:lstStyle/>
+          <a:p>
+            <a:pPr algn="l">
+              <a:lnSpc>
+                <a:spcPts val="1073"/>
+              </a:lnSpc>
+            </a:pPr>
+            <a:r>
+              <a:rPr sz="740" b="0">
                 <a:solidFill>
                   <a:srgbClr val="12151C"/>
                 </a:solidFill>
                 <a:latin typeface="맑은 고딕"/>
                 <a:ea typeface="맑은 고딕"/>
               </a:rPr>
-              <a:t>사람을 살핍니다</a:t>
-            </a:r>
-          </a:p>
-        </p:txBody>
-      </p:sp>
-      <p:sp>
-        <p:nvSpPr>
-          <p:cNvPr id="4" name="텍스트"/>
+              <a:t>주민 서비스</a:t>
+            </a:r>
+          </a:p>
+        </p:txBody>
+      </p:sp>
+      <p:cxnSp>
+        <p:nvCxnSpPr>
+          <p:cNvPr id="9" name="Connector 8"/>
+          <p:cNvCxnSpPr/>
+          <p:nvPr/>
+        </p:nvCxnSpPr>
+        <p:spPr>
+          <a:xfrm>
+            <a:off x="1656000" y="691200"/>
+            <a:ext cx="1296000" cy="0"/>
+          </a:xfrm>
+          <a:prstGeom prst="line">
+            <a:avLst/>
+          </a:prstGeom>
+          <a:ln w="3600">
+            <a:solidFill>
+              <a:srgbClr val="E3E5E9"/>
+            </a:solidFill>
+          </a:ln>
+        </p:spPr>
+      </p:cxnSp>
+      <p:sp>
+        <p:nvSpPr>
+          <p:cNvPr id="10" name="텍스트"/>
           <p:cNvSpPr txBox="1"/>
           <p:nvPr/>
         </p:nvSpPr>
         <p:spPr>
           <a:xfrm>
-            <a:off x="424800" y="1512000"/>
-            <a:ext cx="1800000" cy="123826"/>
+            <a:off x="252000" y="813600"/>
+            <a:ext cx="216000" cy="99061"/>
           </a:xfrm>
           <a:prstGeom prst="rect">
             <a:avLst/>
@@ -3706,18 +3883,260 @@
           <a:p>
             <a:pPr algn="l">
               <a:lnSpc>
-                <a:spcPts val="942"/>
+                <a:spcPts val="754"/>
               </a:lnSpc>
             </a:pPr>
             <a:r>
-              <a:rPr sz="650" b="1" spc="200">
+              <a:rPr sz="520" b="1" spc="100">
+                <a:solidFill>
+                  <a:srgbClr val="FF6A13"/>
+                </a:solidFill>
+                <a:latin typeface="맑은 고딕"/>
+                <a:ea typeface="맑은 고딕"/>
+              </a:rPr>
+              <a:t>03</a:t>
+            </a:r>
+          </a:p>
+        </p:txBody>
+      </p:sp>
+      <p:sp>
+        <p:nvSpPr>
+          <p:cNvPr id="11" name="텍스트"/>
+          <p:cNvSpPr txBox="1"/>
+          <p:nvPr/>
+        </p:nvSpPr>
+        <p:spPr>
+          <a:xfrm>
+            <a:off x="475200" y="802800"/>
+            <a:ext cx="1152000" cy="140971"/>
+          </a:xfrm>
+          <a:prstGeom prst="rect">
+            <a:avLst/>
+          </a:prstGeom>
+          <a:noFill/>
+        </p:spPr>
+        <p:txBody>
+          <a:bodyPr wrap="square" lIns="0" rIns="0" tIns="0" bIns="0" anchor="t">
+            <a:spAutoFit/>
+          </a:bodyPr>
+          <a:lstStyle/>
+          <a:p>
+            <a:pPr algn="l">
+              <a:lnSpc>
+                <a:spcPts val="1073"/>
+              </a:lnSpc>
+            </a:pPr>
+            <a:r>
+              <a:rPr sz="740" b="0">
+                <a:solidFill>
+                  <a:srgbClr val="12151C"/>
+                </a:solidFill>
+                <a:latin typeface="맑은 고딕"/>
+                <a:ea typeface="맑은 고딕"/>
+              </a:rPr>
+              <a:t>교통 안내</a:t>
+            </a:r>
+          </a:p>
+        </p:txBody>
+      </p:sp>
+      <p:cxnSp>
+        <p:nvCxnSpPr>
+          <p:cNvPr id="12" name="Connector 11"/>
+          <p:cNvCxnSpPr/>
+          <p:nvPr/>
+        </p:nvCxnSpPr>
+        <p:spPr>
+          <a:xfrm>
+            <a:off x="252000" y="1036800"/>
+            <a:ext cx="1296000" cy="0"/>
+          </a:xfrm>
+          <a:prstGeom prst="line">
+            <a:avLst/>
+          </a:prstGeom>
+          <a:ln w="3600">
+            <a:solidFill>
+              <a:srgbClr val="E3E5E9"/>
+            </a:solidFill>
+          </a:ln>
+        </p:spPr>
+      </p:cxnSp>
+      <p:sp>
+        <p:nvSpPr>
+          <p:cNvPr id="13" name="텍스트"/>
+          <p:cNvSpPr txBox="1"/>
+          <p:nvPr/>
+        </p:nvSpPr>
+        <p:spPr>
+          <a:xfrm>
+            <a:off x="1656000" y="813600"/>
+            <a:ext cx="216000" cy="99061"/>
+          </a:xfrm>
+          <a:prstGeom prst="rect">
+            <a:avLst/>
+          </a:prstGeom>
+          <a:noFill/>
+        </p:spPr>
+        <p:txBody>
+          <a:bodyPr wrap="square" lIns="0" rIns="0" tIns="0" bIns="0" anchor="t">
+            <a:spAutoFit/>
+          </a:bodyPr>
+          <a:lstStyle/>
+          <a:p>
+            <a:pPr algn="l">
+              <a:lnSpc>
+                <a:spcPts val="754"/>
+              </a:lnSpc>
+            </a:pPr>
+            <a:r>
+              <a:rPr sz="520" b="1" spc="100">
+                <a:solidFill>
+                  <a:srgbClr val="FF6A13"/>
+                </a:solidFill>
+                <a:latin typeface="맑은 고딕"/>
+                <a:ea typeface="맑은 고딕"/>
+              </a:rPr>
+              <a:t>04</a:t>
+            </a:r>
+          </a:p>
+        </p:txBody>
+      </p:sp>
+      <p:sp>
+        <p:nvSpPr>
+          <p:cNvPr id="14" name="텍스트"/>
+          <p:cNvSpPr txBox="1"/>
+          <p:nvPr/>
+        </p:nvSpPr>
+        <p:spPr>
+          <a:xfrm>
+            <a:off x="1879200" y="802800"/>
+            <a:ext cx="1152000" cy="140971"/>
+          </a:xfrm>
+          <a:prstGeom prst="rect">
+            <a:avLst/>
+          </a:prstGeom>
+          <a:noFill/>
+        </p:spPr>
+        <p:txBody>
+          <a:bodyPr wrap="square" lIns="0" rIns="0" tIns="0" bIns="0" anchor="t">
+            <a:spAutoFit/>
+          </a:bodyPr>
+          <a:lstStyle/>
+          <a:p>
+            <a:pPr algn="l">
+              <a:lnSpc>
+                <a:spcPts val="1073"/>
+              </a:lnSpc>
+            </a:pPr>
+            <a:r>
+              <a:rPr sz="740" b="0">
+                <a:solidFill>
+                  <a:srgbClr val="12151C"/>
+                </a:solidFill>
+                <a:latin typeface="맑은 고딕"/>
+                <a:ea typeface="맑은 고딕"/>
+              </a:rPr>
+              <a:t>노인 복지</a:t>
+            </a:r>
+          </a:p>
+        </p:txBody>
+      </p:sp>
+      <p:cxnSp>
+        <p:nvCxnSpPr>
+          <p:cNvPr id="15" name="Connector 14"/>
+          <p:cNvCxnSpPr/>
+          <p:nvPr/>
+        </p:nvCxnSpPr>
+        <p:spPr>
+          <a:xfrm>
+            <a:off x="1656000" y="1036800"/>
+            <a:ext cx="1296000" cy="0"/>
+          </a:xfrm>
+          <a:prstGeom prst="line">
+            <a:avLst/>
+          </a:prstGeom>
+          <a:ln w="3600">
+            <a:solidFill>
+              <a:srgbClr val="E3E5E9"/>
+            </a:solidFill>
+          </a:ln>
+        </p:spPr>
+      </p:cxnSp>
+      <p:sp>
+        <p:nvSpPr>
+          <p:cNvPr id="16" name="텍스트"/>
+          <p:cNvSpPr txBox="1"/>
+          <p:nvPr/>
+        </p:nvSpPr>
+        <p:spPr>
+          <a:xfrm>
+            <a:off x="252000" y="1569600"/>
+            <a:ext cx="1368000" cy="114301"/>
+          </a:xfrm>
+          <a:prstGeom prst="rect">
+            <a:avLst/>
+          </a:prstGeom>
+          <a:noFill/>
+        </p:spPr>
+        <p:txBody>
+          <a:bodyPr wrap="square" lIns="0" rIns="0" tIns="0" bIns="0" anchor="t">
+            <a:spAutoFit/>
+          </a:bodyPr>
+          <a:lstStyle/>
+          <a:p>
+            <a:pPr algn="l">
+              <a:lnSpc>
+                <a:spcPts val="869"/>
+              </a:lnSpc>
+            </a:pPr>
+            <a:r>
+              <a:rPr sz="600" b="0">
                 <a:solidFill>
                   <a:srgbClr val="6B7280"/>
                 </a:solidFill>
                 <a:latin typeface="맑은 고딕"/>
                 <a:ea typeface="맑은 고딕"/>
               </a:rPr>
-              <a:t>기관명 · 부서명</a:t>
+              <a:t>평일 09:00 – 18:00</a:t>
+            </a:r>
+          </a:p>
+        </p:txBody>
+      </p:sp>
+      <p:sp>
+        <p:nvSpPr>
+          <p:cNvPr id="17" name="텍스트"/>
+          <p:cNvSpPr txBox="1"/>
+          <p:nvPr/>
+        </p:nvSpPr>
+        <p:spPr>
+          <a:xfrm>
+            <a:off x="1620000" y="1569600"/>
+            <a:ext cx="1368000" cy="114301"/>
+          </a:xfrm>
+          <a:prstGeom prst="rect">
+            <a:avLst/>
+          </a:prstGeom>
+          <a:noFill/>
+        </p:spPr>
+        <p:txBody>
+          <a:bodyPr wrap="square" lIns="0" rIns="0" tIns="0" bIns="0" anchor="t">
+            <a:spAutoFit/>
+          </a:bodyPr>
+          <a:lstStyle/>
+          <a:p>
+            <a:pPr algn="r">
+              <a:lnSpc>
+                <a:spcPts val="869"/>
+              </a:lnSpc>
+            </a:pPr>
+            <a:r>
+              <a:rPr sz="600" b="0">
+                <a:solidFill>
+                  <a:srgbClr val="6B7280"/>
+                </a:solidFill>
+                <a:latin typeface="맑은 고딕"/>
+                <a:ea typeface="맑은 고딕"/>
+              </a:rPr>
+              <a:t>@채널아이디</a:t>
             </a:r>
           </a:p>
         </p:txBody>
